--- a/n8n project/worflow 1/screenshots_08_12_2026.pptx
+++ b/n8n project/worflow 1/screenshots_08_12_2026.pptx
@@ -282,7 +282,7 @@
           <a:p>
             <a:fld id="{B3F14AC2-C97C-4AD2-B395-4C68AA3B75FD}" type="datetimeFigureOut">
               <a:rPr lang="en-US" smtClean="0"/>
-              <a:t>8/10/2026</a:t>
+              <a:t>8/12/2026</a:t>
             </a:fld>
             <a:endParaRPr lang="en-US"/>
           </a:p>
@@ -480,7 +480,7 @@
           <a:p>
             <a:fld id="{B3F14AC2-C97C-4AD2-B395-4C68AA3B75FD}" type="datetimeFigureOut">
               <a:rPr lang="en-US" smtClean="0"/>
-              <a:t>8/10/2026</a:t>
+              <a:t>8/12/2026</a:t>
             </a:fld>
             <a:endParaRPr lang="en-US"/>
           </a:p>
@@ -688,7 +688,7 @@
           <a:p>
             <a:fld id="{B3F14AC2-C97C-4AD2-B395-4C68AA3B75FD}" type="datetimeFigureOut">
               <a:rPr lang="en-US" smtClean="0"/>
-              <a:t>8/10/2026</a:t>
+              <a:t>8/12/2026</a:t>
             </a:fld>
             <a:endParaRPr lang="en-US"/>
           </a:p>
@@ -886,7 +886,7 @@
           <a:p>
             <a:fld id="{B3F14AC2-C97C-4AD2-B395-4C68AA3B75FD}" type="datetimeFigureOut">
               <a:rPr lang="en-US" smtClean="0"/>
-              <a:t>8/10/2026</a:t>
+              <a:t>8/12/2026</a:t>
             </a:fld>
             <a:endParaRPr lang="en-US"/>
           </a:p>
@@ -1161,7 +1161,7 @@
           <a:p>
             <a:fld id="{B3F14AC2-C97C-4AD2-B395-4C68AA3B75FD}" type="datetimeFigureOut">
               <a:rPr lang="en-US" smtClean="0"/>
-              <a:t>8/10/2026</a:t>
+              <a:t>8/12/2026</a:t>
             </a:fld>
             <a:endParaRPr lang="en-US"/>
           </a:p>
@@ -1426,7 +1426,7 @@
           <a:p>
             <a:fld id="{B3F14AC2-C97C-4AD2-B395-4C68AA3B75FD}" type="datetimeFigureOut">
               <a:rPr lang="en-US" smtClean="0"/>
-              <a:t>8/10/2026</a:t>
+              <a:t>8/12/2026</a:t>
             </a:fld>
             <a:endParaRPr lang="en-US"/>
           </a:p>
@@ -1838,7 +1838,7 @@
           <a:p>
             <a:fld id="{B3F14AC2-C97C-4AD2-B395-4C68AA3B75FD}" type="datetimeFigureOut">
               <a:rPr lang="en-US" smtClean="0"/>
-              <a:t>8/10/2026</a:t>
+              <a:t>8/12/2026</a:t>
             </a:fld>
             <a:endParaRPr lang="en-US"/>
           </a:p>
@@ -1979,7 +1979,7 @@
           <a:p>
             <a:fld id="{B3F14AC2-C97C-4AD2-B395-4C68AA3B75FD}" type="datetimeFigureOut">
               <a:rPr lang="en-US" smtClean="0"/>
-              <a:t>8/10/2026</a:t>
+              <a:t>8/12/2026</a:t>
             </a:fld>
             <a:endParaRPr lang="en-US"/>
           </a:p>
@@ -2092,7 +2092,7 @@
           <a:p>
             <a:fld id="{B3F14AC2-C97C-4AD2-B395-4C68AA3B75FD}" type="datetimeFigureOut">
               <a:rPr lang="en-US" smtClean="0"/>
-              <a:t>8/10/2026</a:t>
+              <a:t>8/12/2026</a:t>
             </a:fld>
             <a:endParaRPr lang="en-US"/>
           </a:p>
@@ -2403,7 +2403,7 @@
           <a:p>
             <a:fld id="{B3F14AC2-C97C-4AD2-B395-4C68AA3B75FD}" type="datetimeFigureOut">
               <a:rPr lang="en-US" smtClean="0"/>
-              <a:t>8/10/2026</a:t>
+              <a:t>8/12/2026</a:t>
             </a:fld>
             <a:endParaRPr lang="en-US"/>
           </a:p>
@@ -2691,7 +2691,7 @@
           <a:p>
             <a:fld id="{B3F14AC2-C97C-4AD2-B395-4C68AA3B75FD}" type="datetimeFigureOut">
               <a:rPr lang="en-US" smtClean="0"/>
-              <a:t>8/10/2026</a:t>
+              <a:t>8/12/2026</a:t>
             </a:fld>
             <a:endParaRPr lang="en-US"/>
           </a:p>
@@ -2932,7 +2932,7 @@
           <a:p>
             <a:fld id="{B3F14AC2-C97C-4AD2-B395-4C68AA3B75FD}" type="datetimeFigureOut">
               <a:rPr lang="en-US" smtClean="0"/>
-              <a:t>8/10/2026</a:t>
+              <a:t>8/12/2026</a:t>
             </a:fld>
             <a:endParaRPr lang="en-US"/>
           </a:p>

--- a/n8n project/worflow 1/screenshots_08_12_2026.pptx
+++ b/n8n project/worflow 1/screenshots_08_12_2026.pptx
@@ -23,12 +23,13 @@
     <p:sldId id="270" r:id="rId17"/>
     <p:sldId id="271" r:id="rId18"/>
     <p:sldId id="272" r:id="rId19"/>
-    <p:sldId id="273" r:id="rId20"/>
-    <p:sldId id="274" r:id="rId21"/>
-    <p:sldId id="275" r:id="rId22"/>
-    <p:sldId id="276" r:id="rId23"/>
-    <p:sldId id="277" r:id="rId24"/>
-    <p:sldId id="278" r:id="rId25"/>
+    <p:sldId id="280" r:id="rId20"/>
+    <p:sldId id="273" r:id="rId21"/>
+    <p:sldId id="274" r:id="rId22"/>
+    <p:sldId id="275" r:id="rId23"/>
+    <p:sldId id="276" r:id="rId24"/>
+    <p:sldId id="277" r:id="rId25"/>
+    <p:sldId id="278" r:id="rId26"/>
   </p:sldIdLst>
   <p:sldSz cx="12192000" cy="6858000"/>
   <p:notesSz cx="6858000" cy="9144000"/>
@@ -4175,12 +4176,46 @@
           <a:chExt cx="0" cy="0"/>
         </a:xfrm>
       </p:grpSpPr>
+      <p:sp>
+        <p:nvSpPr>
+          <p:cNvPr id="2" name="Title 1">
+            <a:extLst>
+              <a:ext uri="{FF2B5EF4-FFF2-40B4-BE49-F238E27FC236}">
+                <a16:creationId xmlns:a16="http://schemas.microsoft.com/office/drawing/2014/main" id="{9AD30B50-F009-566E-80F5-AC62F6BDCBD4}"/>
+              </a:ext>
+            </a:extLst>
+          </p:cNvPr>
+          <p:cNvSpPr>
+            <a:spLocks noGrp="1"/>
+          </p:cNvSpPr>
+          <p:nvPr>
+            <p:ph type="title"/>
+          </p:nvPr>
+        </p:nvSpPr>
+        <p:spPr>
+          <a:xfrm>
+            <a:off x="1138646" y="1"/>
+            <a:ext cx="10515600" cy="705394"/>
+          </a:xfrm>
+        </p:spPr>
+        <p:txBody>
+          <a:bodyPr/>
+          <a:lstStyle/>
+          <a:p>
+            <a:pPr algn="ctr"/>
+            <a:r>
+              <a:rPr lang="en-US" dirty="0"/>
+              <a:t>In n8n</a:t>
+            </a:r>
+          </a:p>
+        </p:txBody>
+      </p:sp>
       <p:pic>
         <p:nvPicPr>
           <p:cNvPr id="5" name="Picture 4">
             <a:extLst>
               <a:ext uri="{FF2B5EF4-FFF2-40B4-BE49-F238E27FC236}">
-                <a16:creationId xmlns:a16="http://schemas.microsoft.com/office/drawing/2014/main" id="{A1D392AF-657F-39BF-168C-28EC1DCC5F12}"/>
+                <a16:creationId xmlns:a16="http://schemas.microsoft.com/office/drawing/2014/main" id="{BC40C557-683B-1D1A-1E4A-C83A622154A6}"/>
               </a:ext>
             </a:extLst>
           </p:cNvPr>
@@ -4197,8 +4232,8 @@
         </p:blipFill>
         <p:spPr>
           <a:xfrm>
-            <a:off x="2634420" y="0"/>
-            <a:ext cx="6923159" cy="6858000"/>
+            <a:off x="0" y="826802"/>
+            <a:ext cx="12192000" cy="5900570"/>
           </a:xfrm>
           <a:prstGeom prst="rect">
             <a:avLst/>
@@ -4208,7 +4243,7 @@
     </p:spTree>
     <p:extLst>
       <p:ext uri="{BB962C8B-B14F-4D97-AF65-F5344CB8AC3E}">
-        <p14:creationId xmlns:p14="http://schemas.microsoft.com/office/powerpoint/2010/main" val="3965923662"/>
+        <p14:creationId xmlns:p14="http://schemas.microsoft.com/office/powerpoint/2010/main" val="3272188849"/>
       </p:ext>
     </p:extLst>
   </p:cSld>
@@ -4295,60 +4330,40 @@
           <a:chExt cx="0" cy="0"/>
         </a:xfrm>
       </p:grpSpPr>
-      <p:sp>
-        <p:nvSpPr>
-          <p:cNvPr id="2" name="Title 1">
-            <a:extLst>
-              <a:ext uri="{FF2B5EF4-FFF2-40B4-BE49-F238E27FC236}">
-                <a16:creationId xmlns:a16="http://schemas.microsoft.com/office/drawing/2014/main" id="{AB08E1E0-AEE4-856B-834F-E6B4F154E72A}"/>
-              </a:ext>
-            </a:extLst>
-          </p:cNvPr>
-          <p:cNvSpPr>
-            <a:spLocks noGrp="1"/>
-          </p:cNvSpPr>
-          <p:nvPr>
-            <p:ph type="title"/>
-          </p:nvPr>
-        </p:nvSpPr>
-        <p:spPr/>
-        <p:txBody>
-          <a:bodyPr/>
-          <a:lstStyle/>
-          <a:p>
-            <a:endParaRPr lang="en-US"/>
-          </a:p>
-        </p:txBody>
-      </p:sp>
-      <p:sp>
-        <p:nvSpPr>
-          <p:cNvPr id="3" name="Content Placeholder 2">
-            <a:extLst>
-              <a:ext uri="{FF2B5EF4-FFF2-40B4-BE49-F238E27FC236}">
-                <a16:creationId xmlns:a16="http://schemas.microsoft.com/office/drawing/2014/main" id="{25778202-9E1F-0653-0397-00DB4A37F12B}"/>
-              </a:ext>
-            </a:extLst>
-          </p:cNvPr>
-          <p:cNvSpPr>
-            <a:spLocks noGrp="1"/>
-          </p:cNvSpPr>
-          <p:nvPr>
-            <p:ph idx="1"/>
-          </p:nvPr>
-        </p:nvSpPr>
-        <p:spPr/>
-        <p:txBody>
-          <a:bodyPr/>
-          <a:lstStyle/>
-          <a:p>
-            <a:endParaRPr lang="en-US"/>
-          </a:p>
-        </p:txBody>
-      </p:sp>
+      <p:pic>
+        <p:nvPicPr>
+          <p:cNvPr id="5" name="Picture 4">
+            <a:extLst>
+              <a:ext uri="{FF2B5EF4-FFF2-40B4-BE49-F238E27FC236}">
+                <a16:creationId xmlns:a16="http://schemas.microsoft.com/office/drawing/2014/main" id="{A1D392AF-657F-39BF-168C-28EC1DCC5F12}"/>
+              </a:ext>
+            </a:extLst>
+          </p:cNvPr>
+          <p:cNvPicPr>
+            <a:picLocks noChangeAspect="1"/>
+          </p:cNvPicPr>
+          <p:nvPr/>
+        </p:nvPicPr>
+        <p:blipFill>
+          <a:blip r:embed="rId2"/>
+          <a:stretch>
+            <a:fillRect/>
+          </a:stretch>
+        </p:blipFill>
+        <p:spPr>
+          <a:xfrm>
+            <a:off x="2634420" y="0"/>
+            <a:ext cx="6923159" cy="6858000"/>
+          </a:xfrm>
+          <a:prstGeom prst="rect">
+            <a:avLst/>
+          </a:prstGeom>
+        </p:spPr>
+      </p:pic>
     </p:spTree>
     <p:extLst>
       <p:ext uri="{BB962C8B-B14F-4D97-AF65-F5344CB8AC3E}">
-        <p14:creationId xmlns:p14="http://schemas.microsoft.com/office/powerpoint/2010/main" val="2602848826"/>
+        <p14:creationId xmlns:p14="http://schemas.microsoft.com/office/powerpoint/2010/main" val="3965923662"/>
       </p:ext>
     </p:extLst>
   </p:cSld>
@@ -4377,6 +4392,86 @@
       </p:grpSpPr>
       <p:sp>
         <p:nvSpPr>
+          <p:cNvPr id="2" name="Title 1">
+            <a:extLst>
+              <a:ext uri="{FF2B5EF4-FFF2-40B4-BE49-F238E27FC236}">
+                <a16:creationId xmlns:a16="http://schemas.microsoft.com/office/drawing/2014/main" id="{AB08E1E0-AEE4-856B-834F-E6B4F154E72A}"/>
+              </a:ext>
+            </a:extLst>
+          </p:cNvPr>
+          <p:cNvSpPr>
+            <a:spLocks noGrp="1"/>
+          </p:cNvSpPr>
+          <p:nvPr>
+            <p:ph type="title"/>
+          </p:nvPr>
+        </p:nvSpPr>
+        <p:spPr/>
+        <p:txBody>
+          <a:bodyPr/>
+          <a:lstStyle/>
+          <a:p>
+            <a:endParaRPr lang="en-US"/>
+          </a:p>
+        </p:txBody>
+      </p:sp>
+      <p:sp>
+        <p:nvSpPr>
+          <p:cNvPr id="3" name="Content Placeholder 2">
+            <a:extLst>
+              <a:ext uri="{FF2B5EF4-FFF2-40B4-BE49-F238E27FC236}">
+                <a16:creationId xmlns:a16="http://schemas.microsoft.com/office/drawing/2014/main" id="{25778202-9E1F-0653-0397-00DB4A37F12B}"/>
+              </a:ext>
+            </a:extLst>
+          </p:cNvPr>
+          <p:cNvSpPr>
+            <a:spLocks noGrp="1"/>
+          </p:cNvSpPr>
+          <p:nvPr>
+            <p:ph idx="1"/>
+          </p:nvPr>
+        </p:nvSpPr>
+        <p:spPr/>
+        <p:txBody>
+          <a:bodyPr/>
+          <a:lstStyle/>
+          <a:p>
+            <a:endParaRPr lang="en-US"/>
+          </a:p>
+        </p:txBody>
+      </p:sp>
+    </p:spTree>
+    <p:extLst>
+      <p:ext uri="{BB962C8B-B14F-4D97-AF65-F5344CB8AC3E}">
+        <p14:creationId xmlns:p14="http://schemas.microsoft.com/office/powerpoint/2010/main" val="2602848826"/>
+      </p:ext>
+    </p:extLst>
+  </p:cSld>
+  <p:clrMapOvr>
+    <a:masterClrMapping/>
+  </p:clrMapOvr>
+</p:sld>
+</file>
+
+<file path=ppt/slides/slide22.xml><?xml version="1.0" encoding="utf-8"?>
+<p:sld xmlns:a="http://schemas.openxmlformats.org/drawingml/2006/main" xmlns:r="http://schemas.openxmlformats.org/officeDocument/2006/relationships" xmlns:p="http://schemas.openxmlformats.org/presentationml/2006/main">
+  <p:cSld>
+    <p:spTree>
+      <p:nvGrpSpPr>
+        <p:cNvPr id="1" name=""/>
+        <p:cNvGrpSpPr/>
+        <p:nvPr/>
+      </p:nvGrpSpPr>
+      <p:grpSpPr>
+        <a:xfrm>
+          <a:off x="0" y="0"/>
+          <a:ext cx="0" cy="0"/>
+          <a:chOff x="0" y="0"/>
+          <a:chExt cx="0" cy="0"/>
+        </a:xfrm>
+      </p:grpSpPr>
+      <p:sp>
+        <p:nvSpPr>
           <p:cNvPr id="5" name="TextBox 4">
             <a:extLst>
               <a:ext uri="{FF2B5EF4-FFF2-40B4-BE49-F238E27FC236}">
@@ -4589,7 +4684,7 @@
 </p:sld>
 </file>
 
-<file path=ppt/slides/slide22.xml><?xml version="1.0" encoding="utf-8"?>
+<file path=ppt/slides/slide23.xml><?xml version="1.0" encoding="utf-8"?>
 <p:sld xmlns:a="http://schemas.openxmlformats.org/drawingml/2006/main" xmlns:r="http://schemas.openxmlformats.org/officeDocument/2006/relationships" xmlns:p="http://schemas.openxmlformats.org/presentationml/2006/main">
   <p:cSld>
     <p:spTree>
@@ -4649,7 +4744,7 @@
 </p:sld>
 </file>
 
-<file path=ppt/slides/slide23.xml><?xml version="1.0" encoding="utf-8"?>
+<file path=ppt/slides/slide24.xml><?xml version="1.0" encoding="utf-8"?>
 <p:sld xmlns:a="http://schemas.openxmlformats.org/drawingml/2006/main" xmlns:r="http://schemas.openxmlformats.org/officeDocument/2006/relationships" xmlns:p="http://schemas.openxmlformats.org/presentationml/2006/main">
   <p:cSld>
     <p:spTree>
@@ -4709,7 +4804,7 @@
 </p:sld>
 </file>
 
-<file path=ppt/slides/slide24.xml><?xml version="1.0" encoding="utf-8"?>
+<file path=ppt/slides/slide25.xml><?xml version="1.0" encoding="utf-8"?>
 <p:sld xmlns:a="http://schemas.openxmlformats.org/drawingml/2006/main" xmlns:r="http://schemas.openxmlformats.org/officeDocument/2006/relationships" xmlns:p="http://schemas.openxmlformats.org/presentationml/2006/main">
   <p:cSld>
     <p:spTree>
